--- a/09-Terraform/Session2/09-Remote-State-Conditions-loops-Advanced.pptx
+++ b/09-Terraform/Session2/09-Remote-State-Conditions-loops-Advanced.pptx
@@ -1940,7 +1940,7 @@
               <a:buNone/>
             </a:pPr>
             <a:r>
-              <a:rPr lang="en-US" sz="1050" dirty="0">
+              <a:rPr lang="en-US" sz="600" dirty="0">
                 <a:solidFill>
                   <a:srgbClr val="00D4AA"/>
                 </a:solidFill>
@@ -1950,32 +1950,32 @@
               </a:rPr>
               <a:t>variable "environment" { default = "dev" }</a:t>
             </a:r>
-            <a:endParaRPr lang="en-US" sz="1050" dirty="0"/>
-          </a:p>
-          <a:p>
-            <a:pPr marL="0" indent="0">
-              <a:spcBef>
-                <a:spcPts val="200"/>
-              </a:spcBef>
-              <a:spcAft>
-                <a:spcPts val="200"/>
-              </a:spcAft>
-              <a:buNone/>
-            </a:pPr>
-            <a:endParaRPr lang="en-US" sz="1050" dirty="0"/>
-          </a:p>
-          <a:p>
-            <a:pPr marL="0" indent="0">
-              <a:spcBef>
-                <a:spcPts val="200"/>
-              </a:spcBef>
-              <a:spcAft>
-                <a:spcPts val="200"/>
-              </a:spcAft>
-              <a:buNone/>
-            </a:pPr>
-            <a:r>
-              <a:rPr lang="en-US" sz="1050" dirty="0">
+            <a:endParaRPr lang="en-US" sz="600" dirty="0"/>
+          </a:p>
+          <a:p>
+            <a:pPr marL="0" indent="0">
+              <a:spcBef>
+                <a:spcPts val="200"/>
+              </a:spcBef>
+              <a:spcAft>
+                <a:spcPts val="200"/>
+              </a:spcAft>
+              <a:buNone/>
+            </a:pPr>
+            <a:endParaRPr lang="en-US" sz="600" dirty="0"/>
+          </a:p>
+          <a:p>
+            <a:pPr marL="0" indent="0">
+              <a:spcBef>
+                <a:spcPts val="200"/>
+              </a:spcBef>
+              <a:spcAft>
+                <a:spcPts val="200"/>
+              </a:spcAft>
+              <a:buNone/>
+            </a:pPr>
+            <a:r>
+              <a:rPr lang="en-US" sz="600" dirty="0">
                 <a:solidFill>
                   <a:srgbClr val="00D4AA"/>
                 </a:solidFill>
@@ -1985,20 +1985,20 @@
               </a:rPr>
               <a:t># Conditional instance type</a:t>
             </a:r>
-            <a:endParaRPr lang="en-US" sz="1050" dirty="0"/>
-          </a:p>
-          <a:p>
-            <a:pPr marL="0" indent="0">
-              <a:spcBef>
-                <a:spcPts val="200"/>
-              </a:spcBef>
-              <a:spcAft>
-                <a:spcPts val="200"/>
-              </a:spcAft>
-              <a:buNone/>
-            </a:pPr>
-            <a:r>
-              <a:rPr lang="en-US" sz="1050" dirty="0">
+            <a:endParaRPr lang="en-US" sz="600" dirty="0"/>
+          </a:p>
+          <a:p>
+            <a:pPr marL="0" indent="0">
+              <a:spcBef>
+                <a:spcPts val="200"/>
+              </a:spcBef>
+              <a:spcAft>
+                <a:spcPts val="200"/>
+              </a:spcAft>
+              <a:buNone/>
+            </a:pPr>
+            <a:r>
+              <a:rPr lang="en-US" sz="600" dirty="0">
                 <a:solidFill>
                   <a:srgbClr val="00D4AA"/>
                 </a:solidFill>
@@ -2008,20 +2008,20 @@
               </a:rPr>
               <a:t>resource "aws_instance" "web" {</a:t>
             </a:r>
-            <a:endParaRPr lang="en-US" sz="1050" dirty="0"/>
-          </a:p>
-          <a:p>
-            <a:pPr marL="0" indent="0">
-              <a:spcBef>
-                <a:spcPts val="200"/>
-              </a:spcBef>
-              <a:spcAft>
-                <a:spcPts val="200"/>
-              </a:spcAft>
-              <a:buNone/>
-            </a:pPr>
-            <a:r>
-              <a:rPr lang="en-US" sz="1050" dirty="0">
+            <a:endParaRPr lang="en-US" sz="600" dirty="0"/>
+          </a:p>
+          <a:p>
+            <a:pPr marL="0" indent="0">
+              <a:spcBef>
+                <a:spcPts val="200"/>
+              </a:spcBef>
+              <a:spcAft>
+                <a:spcPts val="200"/>
+              </a:spcAft>
+              <a:buNone/>
+            </a:pPr>
+            <a:r>
+              <a:rPr lang="en-US" sz="600" dirty="0">
                 <a:solidFill>
                   <a:srgbClr val="00D4AA"/>
                 </a:solidFill>
@@ -2031,20 +2031,20 @@
               </a:rPr>
               <a:t>  instance_type = var.environment == "prod" ? "t2.large" : "t2.micro"</a:t>
             </a:r>
-            <a:endParaRPr lang="en-US" sz="1050" dirty="0"/>
-          </a:p>
-          <a:p>
-            <a:pPr marL="0" indent="0">
-              <a:spcBef>
-                <a:spcPts val="200"/>
-              </a:spcBef>
-              <a:spcAft>
-                <a:spcPts val="200"/>
-              </a:spcAft>
-              <a:buNone/>
-            </a:pPr>
-            <a:r>
-              <a:rPr lang="en-US" sz="1050" dirty="0">
+            <a:endParaRPr lang="en-US" sz="600" dirty="0"/>
+          </a:p>
+          <a:p>
+            <a:pPr marL="0" indent="0">
+              <a:spcBef>
+                <a:spcPts val="200"/>
+              </a:spcBef>
+              <a:spcAft>
+                <a:spcPts val="200"/>
+              </a:spcAft>
+              <a:buNone/>
+            </a:pPr>
+            <a:r>
+              <a:rPr lang="en-US" sz="600" dirty="0">
                 <a:solidFill>
                   <a:srgbClr val="00D4AA"/>
                 </a:solidFill>
@@ -2054,32 +2054,415 @@
               </a:rPr>
               <a:t>}</a:t>
             </a:r>
-            <a:endParaRPr lang="en-US" sz="1050" dirty="0"/>
-          </a:p>
-          <a:p>
-            <a:pPr marL="0" indent="0">
-              <a:spcBef>
-                <a:spcPts val="200"/>
-              </a:spcBef>
-              <a:spcAft>
-                <a:spcPts val="200"/>
-              </a:spcAft>
-              <a:buNone/>
-            </a:pPr>
-            <a:endParaRPr lang="en-US" sz="1050" dirty="0"/>
-          </a:p>
-          <a:p>
-            <a:pPr marL="0" indent="0">
-              <a:spcBef>
-                <a:spcPts val="200"/>
-              </a:spcBef>
-              <a:spcAft>
-                <a:spcPts val="200"/>
-              </a:spcAft>
-              <a:buNone/>
-            </a:pPr>
-            <a:r>
-              <a:rPr lang="en-US" sz="1050" dirty="0">
+          </a:p>
+          <a:p>
+            <a:pPr marL="0" indent="0">
+              <a:spcBef>
+                <a:spcPts val="200"/>
+              </a:spcBef>
+              <a:spcAft>
+                <a:spcPts val="200"/>
+              </a:spcAft>
+              <a:buNone/>
+            </a:pPr>
+            <a:endParaRPr lang="en-US" sz="600" dirty="0">
+              <a:solidFill>
+                <a:srgbClr val="00D4AA"/>
+              </a:solidFill>
+              <a:latin typeface="Consolas" pitchFamily="34" charset="0"/>
+            </a:endParaRPr>
+          </a:p>
+          <a:p>
+            <a:pPr>
+              <a:spcBef>
+                <a:spcPts val="200"/>
+              </a:spcBef>
+              <a:spcAft>
+                <a:spcPts val="200"/>
+              </a:spcAft>
+            </a:pPr>
+            <a:r>
+              <a:rPr lang="en-US" sz="600" dirty="0">
+                <a:solidFill>
+                  <a:srgbClr val="00D4AA"/>
+                </a:solidFill>
+                <a:latin typeface="Consolas" pitchFamily="34" charset="0"/>
+                <a:ea typeface="Consolas" pitchFamily="34" charset="-122"/>
+                <a:cs typeface="Consolas" pitchFamily="34" charset="-120"/>
+              </a:rPr>
+              <a:t># Conditional instance type</a:t>
+            </a:r>
+            <a:endParaRPr lang="en-US" sz="600" dirty="0"/>
+          </a:p>
+          <a:p>
+            <a:pPr>
+              <a:spcBef>
+                <a:spcPts val="200"/>
+              </a:spcBef>
+              <a:spcAft>
+                <a:spcPts val="200"/>
+              </a:spcAft>
+            </a:pPr>
+            <a:r>
+              <a:rPr lang="en-US" sz="600" dirty="0">
+                <a:solidFill>
+                  <a:srgbClr val="00D4AA"/>
+                </a:solidFill>
+                <a:latin typeface="Consolas" pitchFamily="34" charset="0"/>
+                <a:ea typeface="Consolas" pitchFamily="34" charset="-122"/>
+                <a:cs typeface="Consolas" pitchFamily="34" charset="-120"/>
+              </a:rPr>
+              <a:t>resource "</a:t>
+            </a:r>
+            <a:r>
+              <a:rPr lang="en-US" sz="600" dirty="0" err="1">
+                <a:solidFill>
+                  <a:srgbClr val="00D4AA"/>
+                </a:solidFill>
+                <a:latin typeface="Consolas" pitchFamily="34" charset="0"/>
+                <a:ea typeface="Consolas" pitchFamily="34" charset="-122"/>
+                <a:cs typeface="Consolas" pitchFamily="34" charset="-120"/>
+              </a:rPr>
+              <a:t>aws_instance</a:t>
+            </a:r>
+            <a:r>
+              <a:rPr lang="en-US" sz="600" dirty="0">
+                <a:solidFill>
+                  <a:srgbClr val="00D4AA"/>
+                </a:solidFill>
+                <a:latin typeface="Consolas" pitchFamily="34" charset="0"/>
+                <a:ea typeface="Consolas" pitchFamily="34" charset="-122"/>
+                <a:cs typeface="Consolas" pitchFamily="34" charset="-120"/>
+              </a:rPr>
+              <a:t>" "web" {</a:t>
+            </a:r>
+            <a:endParaRPr lang="en-US" sz="600" dirty="0"/>
+          </a:p>
+          <a:p>
+            <a:pPr>
+              <a:spcBef>
+                <a:spcPts val="200"/>
+              </a:spcBef>
+              <a:spcAft>
+                <a:spcPts val="200"/>
+              </a:spcAft>
+            </a:pPr>
+            <a:r>
+              <a:rPr lang="en-US" sz="600" dirty="0">
+                <a:solidFill>
+                  <a:srgbClr val="00D4AA"/>
+                </a:solidFill>
+                <a:latin typeface="Consolas" pitchFamily="34" charset="0"/>
+                <a:ea typeface="Consolas" pitchFamily="34" charset="-122"/>
+                <a:cs typeface="Consolas" pitchFamily="34" charset="-120"/>
+              </a:rPr>
+              <a:t>  </a:t>
+            </a:r>
+            <a:r>
+              <a:rPr lang="en-US" sz="600" dirty="0" err="1">
+                <a:solidFill>
+                  <a:srgbClr val="00D4AA"/>
+                </a:solidFill>
+                <a:latin typeface="Consolas" pitchFamily="34" charset="0"/>
+                <a:ea typeface="Consolas" pitchFamily="34" charset="-122"/>
+                <a:cs typeface="Consolas" pitchFamily="34" charset="-120"/>
+              </a:rPr>
+              <a:t>instance_type</a:t>
+            </a:r>
+            <a:r>
+              <a:rPr lang="en-US" sz="600" dirty="0">
+                <a:solidFill>
+                  <a:srgbClr val="00D4AA"/>
+                </a:solidFill>
+                <a:latin typeface="Consolas" pitchFamily="34" charset="0"/>
+                <a:ea typeface="Consolas" pitchFamily="34" charset="-122"/>
+                <a:cs typeface="Consolas" pitchFamily="34" charset="-120"/>
+              </a:rPr>
+              <a:t> = </a:t>
+            </a:r>
+            <a:r>
+              <a:rPr lang="en-US" sz="600" dirty="0" err="1">
+                <a:solidFill>
+                  <a:srgbClr val="00D4AA"/>
+                </a:solidFill>
+                <a:latin typeface="Consolas" pitchFamily="34" charset="0"/>
+                <a:ea typeface="Consolas" pitchFamily="34" charset="-122"/>
+                <a:cs typeface="Consolas" pitchFamily="34" charset="-120"/>
+              </a:rPr>
+              <a:t>var.environment</a:t>
+            </a:r>
+            <a:r>
+              <a:rPr lang="en-US" sz="600" dirty="0">
+                <a:solidFill>
+                  <a:srgbClr val="00D4AA"/>
+                </a:solidFill>
+                <a:latin typeface="Consolas" pitchFamily="34" charset="0"/>
+                <a:ea typeface="Consolas" pitchFamily="34" charset="-122"/>
+                <a:cs typeface="Consolas" pitchFamily="34" charset="-120"/>
+              </a:rPr>
+              <a:t> == "prod” &amp;&amp; </a:t>
+            </a:r>
+            <a:r>
+              <a:rPr lang="en-US" sz="600" dirty="0" err="1">
+                <a:solidFill>
+                  <a:srgbClr val="00D4AA"/>
+                </a:solidFill>
+                <a:latin typeface="Consolas" pitchFamily="34" charset="0"/>
+                <a:ea typeface="Consolas" pitchFamily="34" charset="-122"/>
+                <a:cs typeface="Consolas" pitchFamily="34" charset="-120"/>
+              </a:rPr>
+              <a:t>var.create_instance</a:t>
+            </a:r>
+            <a:r>
+              <a:rPr lang="en-US" sz="600" dirty="0">
+                <a:solidFill>
+                  <a:srgbClr val="00D4AA"/>
+                </a:solidFill>
+                <a:latin typeface="Consolas" pitchFamily="34" charset="0"/>
+                <a:ea typeface="Consolas" pitchFamily="34" charset="-122"/>
+                <a:cs typeface="Consolas" pitchFamily="34" charset="-120"/>
+              </a:rPr>
+              <a:t> == “true” ? "t2.large" : "t2.micro"</a:t>
+            </a:r>
+            <a:endParaRPr lang="en-US" sz="600" dirty="0"/>
+          </a:p>
+          <a:p>
+            <a:pPr>
+              <a:spcBef>
+                <a:spcPts val="200"/>
+              </a:spcBef>
+              <a:spcAft>
+                <a:spcPts val="200"/>
+              </a:spcAft>
+            </a:pPr>
+            <a:r>
+              <a:rPr lang="en-US" sz="600" dirty="0">
+                <a:solidFill>
+                  <a:srgbClr val="00D4AA"/>
+                </a:solidFill>
+                <a:latin typeface="Consolas" pitchFamily="34" charset="0"/>
+                <a:ea typeface="Consolas" pitchFamily="34" charset="-122"/>
+                <a:cs typeface="Consolas" pitchFamily="34" charset="-120"/>
+              </a:rPr>
+              <a:t>}</a:t>
+            </a:r>
+          </a:p>
+          <a:p>
+            <a:pPr>
+              <a:spcBef>
+                <a:spcPts val="200"/>
+              </a:spcBef>
+              <a:spcAft>
+                <a:spcPts val="200"/>
+              </a:spcAft>
+            </a:pPr>
+            <a:endParaRPr lang="en-US" sz="600" dirty="0">
+              <a:solidFill>
+                <a:srgbClr val="00D4AA"/>
+              </a:solidFill>
+              <a:latin typeface="Consolas" pitchFamily="34" charset="0"/>
+            </a:endParaRPr>
+          </a:p>
+          <a:p>
+            <a:pPr>
+              <a:spcBef>
+                <a:spcPts val="200"/>
+              </a:spcBef>
+              <a:spcAft>
+                <a:spcPts val="200"/>
+              </a:spcAft>
+            </a:pPr>
+            <a:r>
+              <a:rPr lang="en-US" sz="600" dirty="0">
+                <a:solidFill>
+                  <a:srgbClr val="00D4AA"/>
+                </a:solidFill>
+                <a:latin typeface="Consolas" pitchFamily="34" charset="0"/>
+                <a:ea typeface="Consolas" pitchFamily="34" charset="-122"/>
+                <a:cs typeface="Consolas" pitchFamily="34" charset="-120"/>
+              </a:rPr>
+              <a:t># Conditional instance type</a:t>
+            </a:r>
+            <a:endParaRPr lang="en-US" sz="600" dirty="0"/>
+          </a:p>
+          <a:p>
+            <a:pPr>
+              <a:spcBef>
+                <a:spcPts val="200"/>
+              </a:spcBef>
+              <a:spcAft>
+                <a:spcPts val="200"/>
+              </a:spcAft>
+            </a:pPr>
+            <a:r>
+              <a:rPr lang="en-US" sz="600" dirty="0">
+                <a:solidFill>
+                  <a:srgbClr val="00D4AA"/>
+                </a:solidFill>
+                <a:latin typeface="Consolas" pitchFamily="34" charset="0"/>
+                <a:ea typeface="Consolas" pitchFamily="34" charset="-122"/>
+                <a:cs typeface="Consolas" pitchFamily="34" charset="-120"/>
+              </a:rPr>
+              <a:t>resource "</a:t>
+            </a:r>
+            <a:r>
+              <a:rPr lang="en-US" sz="600" dirty="0" err="1">
+                <a:solidFill>
+                  <a:srgbClr val="00D4AA"/>
+                </a:solidFill>
+                <a:latin typeface="Consolas" pitchFamily="34" charset="0"/>
+                <a:ea typeface="Consolas" pitchFamily="34" charset="-122"/>
+                <a:cs typeface="Consolas" pitchFamily="34" charset="-120"/>
+              </a:rPr>
+              <a:t>aws_instance</a:t>
+            </a:r>
+            <a:r>
+              <a:rPr lang="en-US" sz="600" dirty="0">
+                <a:solidFill>
+                  <a:srgbClr val="00D4AA"/>
+                </a:solidFill>
+                <a:latin typeface="Consolas" pitchFamily="34" charset="0"/>
+                <a:ea typeface="Consolas" pitchFamily="34" charset="-122"/>
+                <a:cs typeface="Consolas" pitchFamily="34" charset="-120"/>
+              </a:rPr>
+              <a:t>" "web" {</a:t>
+            </a:r>
+            <a:endParaRPr lang="en-US" sz="600" dirty="0"/>
+          </a:p>
+          <a:p>
+            <a:pPr>
+              <a:spcBef>
+                <a:spcPts val="200"/>
+              </a:spcBef>
+              <a:spcAft>
+                <a:spcPts val="200"/>
+              </a:spcAft>
+            </a:pPr>
+            <a:r>
+              <a:rPr lang="en-US" sz="600" dirty="0">
+                <a:solidFill>
+                  <a:srgbClr val="00D4AA"/>
+                </a:solidFill>
+                <a:latin typeface="Consolas" pitchFamily="34" charset="0"/>
+                <a:ea typeface="Consolas" pitchFamily="34" charset="-122"/>
+                <a:cs typeface="Consolas" pitchFamily="34" charset="-120"/>
+              </a:rPr>
+              <a:t>  </a:t>
+            </a:r>
+            <a:r>
+              <a:rPr lang="en-US" sz="600" dirty="0" err="1">
+                <a:solidFill>
+                  <a:srgbClr val="00D4AA"/>
+                </a:solidFill>
+                <a:latin typeface="Consolas" pitchFamily="34" charset="0"/>
+                <a:ea typeface="Consolas" pitchFamily="34" charset="-122"/>
+                <a:cs typeface="Consolas" pitchFamily="34" charset="-120"/>
+              </a:rPr>
+              <a:t>instance_type</a:t>
+            </a:r>
+            <a:r>
+              <a:rPr lang="en-US" sz="600" dirty="0">
+                <a:solidFill>
+                  <a:srgbClr val="00D4AA"/>
+                </a:solidFill>
+                <a:latin typeface="Consolas" pitchFamily="34" charset="0"/>
+                <a:ea typeface="Consolas" pitchFamily="34" charset="-122"/>
+                <a:cs typeface="Consolas" pitchFamily="34" charset="-120"/>
+              </a:rPr>
+              <a:t> = </a:t>
+            </a:r>
+            <a:r>
+              <a:rPr lang="en-US" sz="600" dirty="0" err="1">
+                <a:solidFill>
+                  <a:srgbClr val="00D4AA"/>
+                </a:solidFill>
+                <a:latin typeface="Consolas" pitchFamily="34" charset="0"/>
+                <a:ea typeface="Consolas" pitchFamily="34" charset="-122"/>
+                <a:cs typeface="Consolas" pitchFamily="34" charset="-120"/>
+              </a:rPr>
+              <a:t>var.environment</a:t>
+            </a:r>
+            <a:r>
+              <a:rPr lang="en-US" sz="600" dirty="0">
+                <a:solidFill>
+                  <a:srgbClr val="00D4AA"/>
+                </a:solidFill>
+                <a:latin typeface="Consolas" pitchFamily="34" charset="0"/>
+                <a:ea typeface="Consolas" pitchFamily="34" charset="-122"/>
+                <a:cs typeface="Consolas" pitchFamily="34" charset="-120"/>
+              </a:rPr>
+              <a:t> == "prod” || </a:t>
+            </a:r>
+            <a:r>
+              <a:rPr lang="en-US" sz="600" dirty="0" err="1">
+                <a:solidFill>
+                  <a:srgbClr val="00D4AA"/>
+                </a:solidFill>
+                <a:latin typeface="Consolas" pitchFamily="34" charset="0"/>
+                <a:ea typeface="Consolas" pitchFamily="34" charset="-122"/>
+                <a:cs typeface="Consolas" pitchFamily="34" charset="-120"/>
+              </a:rPr>
+              <a:t>var.create_instance</a:t>
+            </a:r>
+            <a:r>
+              <a:rPr lang="en-US" sz="600" dirty="0">
+                <a:solidFill>
+                  <a:srgbClr val="00D4AA"/>
+                </a:solidFill>
+                <a:latin typeface="Consolas" pitchFamily="34" charset="0"/>
+                <a:ea typeface="Consolas" pitchFamily="34" charset="-122"/>
+                <a:cs typeface="Consolas" pitchFamily="34" charset="-120"/>
+              </a:rPr>
+              <a:t> == “true” ? "t2.large" : "t2.micro"</a:t>
+            </a:r>
+            <a:endParaRPr lang="en-US" sz="600" dirty="0"/>
+          </a:p>
+          <a:p>
+            <a:pPr>
+              <a:spcBef>
+                <a:spcPts val="200"/>
+              </a:spcBef>
+              <a:spcAft>
+                <a:spcPts val="200"/>
+              </a:spcAft>
+            </a:pPr>
+            <a:r>
+              <a:rPr lang="en-US" sz="600" dirty="0">
+                <a:solidFill>
+                  <a:srgbClr val="00D4AA"/>
+                </a:solidFill>
+                <a:latin typeface="Consolas" pitchFamily="34" charset="0"/>
+                <a:ea typeface="Consolas" pitchFamily="34" charset="-122"/>
+                <a:cs typeface="Consolas" pitchFamily="34" charset="-120"/>
+              </a:rPr>
+              <a:t>}</a:t>
+            </a:r>
+            <a:endParaRPr lang="en-US" sz="600" dirty="0"/>
+          </a:p>
+          <a:p>
+            <a:pPr marL="0" indent="0">
+              <a:spcBef>
+                <a:spcPts val="200"/>
+              </a:spcBef>
+              <a:spcAft>
+                <a:spcPts val="200"/>
+              </a:spcAft>
+              <a:buNone/>
+            </a:pPr>
+            <a:endParaRPr lang="en-US" sz="600" dirty="0"/>
+          </a:p>
+          <a:p>
+            <a:pPr marL="0" indent="0">
+              <a:spcBef>
+                <a:spcPts val="200"/>
+              </a:spcBef>
+              <a:spcAft>
+                <a:spcPts val="200"/>
+              </a:spcAft>
+              <a:buNone/>
+            </a:pPr>
+            <a:r>
+              <a:rPr lang="en-US" sz="600" dirty="0">
                 <a:solidFill>
                   <a:srgbClr val="00D4AA"/>
                 </a:solidFill>
@@ -2089,20 +2472,20 @@
               </a:rPr>
               <a:t># Conditional resource creation</a:t>
             </a:r>
-            <a:endParaRPr lang="en-US" sz="1050" dirty="0"/>
-          </a:p>
-          <a:p>
-            <a:pPr marL="0" indent="0">
-              <a:spcBef>
-                <a:spcPts val="200"/>
-              </a:spcBef>
-              <a:spcAft>
-                <a:spcPts val="200"/>
-              </a:spcAft>
-              <a:buNone/>
-            </a:pPr>
-            <a:r>
-              <a:rPr lang="en-US" sz="1050" dirty="0">
+            <a:endParaRPr lang="en-US" sz="600" dirty="0"/>
+          </a:p>
+          <a:p>
+            <a:pPr marL="0" indent="0">
+              <a:spcBef>
+                <a:spcPts val="200"/>
+              </a:spcBef>
+              <a:spcAft>
+                <a:spcPts val="200"/>
+              </a:spcAft>
+              <a:buNone/>
+            </a:pPr>
+            <a:r>
+              <a:rPr lang="en-US" sz="600" dirty="0">
                 <a:solidFill>
                   <a:srgbClr val="00D4AA"/>
                 </a:solidFill>
@@ -2112,20 +2495,20 @@
               </a:rPr>
               <a:t>resource "aws_rds_cluster" "db" {</a:t>
             </a:r>
-            <a:endParaRPr lang="en-US" sz="1050" dirty="0"/>
-          </a:p>
-          <a:p>
-            <a:pPr marL="0" indent="0">
-              <a:spcBef>
-                <a:spcPts val="200"/>
-              </a:spcBef>
-              <a:spcAft>
-                <a:spcPts val="200"/>
-              </a:spcAft>
-              <a:buNone/>
-            </a:pPr>
-            <a:r>
-              <a:rPr lang="en-US" sz="1050" dirty="0">
+            <a:endParaRPr lang="en-US" sz="600" dirty="0"/>
+          </a:p>
+          <a:p>
+            <a:pPr marL="0" indent="0">
+              <a:spcBef>
+                <a:spcPts val="200"/>
+              </a:spcBef>
+              <a:spcAft>
+                <a:spcPts val="200"/>
+              </a:spcAft>
+              <a:buNone/>
+            </a:pPr>
+            <a:r>
+              <a:rPr lang="en-US" sz="600" dirty="0">
                 <a:solidFill>
                   <a:srgbClr val="00D4AA"/>
                 </a:solidFill>
@@ -2135,20 +2518,20 @@
               </a:rPr>
               <a:t>  count                = var.environment == "prod" ? 1 : 0</a:t>
             </a:r>
-            <a:endParaRPr lang="en-US" sz="1050" dirty="0"/>
-          </a:p>
-          <a:p>
-            <a:pPr marL="0" indent="0">
-              <a:spcBef>
-                <a:spcPts val="200"/>
-              </a:spcBef>
-              <a:spcAft>
-                <a:spcPts val="200"/>
-              </a:spcAft>
-              <a:buNone/>
-            </a:pPr>
-            <a:r>
-              <a:rPr lang="en-US" sz="1050" dirty="0">
+            <a:endParaRPr lang="en-US" sz="600" dirty="0"/>
+          </a:p>
+          <a:p>
+            <a:pPr marL="0" indent="0">
+              <a:spcBef>
+                <a:spcPts val="200"/>
+              </a:spcBef>
+              <a:spcAft>
+                <a:spcPts val="200"/>
+              </a:spcAft>
+              <a:buNone/>
+            </a:pPr>
+            <a:r>
+              <a:rPr lang="en-US" sz="600" dirty="0">
                 <a:solidFill>
                   <a:srgbClr val="00D4AA"/>
                 </a:solidFill>
@@ -2158,20 +2541,20 @@
               </a:rPr>
               <a:t>  engine               = "aurora"</a:t>
             </a:r>
-            <a:endParaRPr lang="en-US" sz="1050" dirty="0"/>
-          </a:p>
-          <a:p>
-            <a:pPr marL="0" indent="0">
-              <a:spcBef>
-                <a:spcPts val="200"/>
-              </a:spcBef>
-              <a:spcAft>
-                <a:spcPts val="200"/>
-              </a:spcAft>
-              <a:buNone/>
-            </a:pPr>
-            <a:r>
-              <a:rPr lang="en-US" sz="1050" dirty="0">
+            <a:endParaRPr lang="en-US" sz="600" dirty="0"/>
+          </a:p>
+          <a:p>
+            <a:pPr marL="0" indent="0">
+              <a:spcBef>
+                <a:spcPts val="200"/>
+              </a:spcBef>
+              <a:spcAft>
+                <a:spcPts val="200"/>
+              </a:spcAft>
+              <a:buNone/>
+            </a:pPr>
+            <a:r>
+              <a:rPr lang="en-US" sz="600" dirty="0">
                 <a:solidFill>
                   <a:srgbClr val="00D4AA"/>
                 </a:solidFill>
@@ -2181,20 +2564,20 @@
               </a:rPr>
               <a:t>  backup_retention_days = 30</a:t>
             </a:r>
-            <a:endParaRPr lang="en-US" sz="1050" dirty="0"/>
-          </a:p>
-          <a:p>
-            <a:pPr marL="0" indent="0">
-              <a:spcBef>
-                <a:spcPts val="200"/>
-              </a:spcBef>
-              <a:spcAft>
-                <a:spcPts val="200"/>
-              </a:spcAft>
-              <a:buNone/>
-            </a:pPr>
-            <a:r>
-              <a:rPr lang="en-US" sz="1050" dirty="0">
+            <a:endParaRPr lang="en-US" sz="600" dirty="0"/>
+          </a:p>
+          <a:p>
+            <a:pPr marL="0" indent="0">
+              <a:spcBef>
+                <a:spcPts val="200"/>
+              </a:spcBef>
+              <a:spcAft>
+                <a:spcPts val="200"/>
+              </a:spcAft>
+              <a:buNone/>
+            </a:pPr>
+            <a:r>
+              <a:rPr lang="en-US" sz="600" dirty="0">
                 <a:solidFill>
                   <a:srgbClr val="00D4AA"/>
                 </a:solidFill>
@@ -2204,32 +2587,32 @@
               </a:rPr>
               <a:t>}</a:t>
             </a:r>
-            <a:endParaRPr lang="en-US" sz="1050" dirty="0"/>
-          </a:p>
-          <a:p>
-            <a:pPr marL="0" indent="0">
-              <a:spcBef>
-                <a:spcPts val="200"/>
-              </a:spcBef>
-              <a:spcAft>
-                <a:spcPts val="200"/>
-              </a:spcAft>
-              <a:buNone/>
-            </a:pPr>
-            <a:endParaRPr lang="en-US" sz="1050" dirty="0"/>
-          </a:p>
-          <a:p>
-            <a:pPr marL="0" indent="0">
-              <a:spcBef>
-                <a:spcPts val="200"/>
-              </a:spcBef>
-              <a:spcAft>
-                <a:spcPts val="200"/>
-              </a:spcAft>
-              <a:buNone/>
-            </a:pPr>
-            <a:r>
-              <a:rPr lang="en-US" sz="1050" dirty="0">
+            <a:endParaRPr lang="en-US" sz="600" dirty="0"/>
+          </a:p>
+          <a:p>
+            <a:pPr marL="0" indent="0">
+              <a:spcBef>
+                <a:spcPts val="200"/>
+              </a:spcBef>
+              <a:spcAft>
+                <a:spcPts val="200"/>
+              </a:spcAft>
+              <a:buNone/>
+            </a:pPr>
+            <a:endParaRPr lang="en-US" sz="600" dirty="0"/>
+          </a:p>
+          <a:p>
+            <a:pPr marL="0" indent="0">
+              <a:spcBef>
+                <a:spcPts val="200"/>
+              </a:spcBef>
+              <a:spcAft>
+                <a:spcPts val="200"/>
+              </a:spcAft>
+              <a:buNone/>
+            </a:pPr>
+            <a:r>
+              <a:rPr lang="en-US" sz="600" dirty="0">
                 <a:solidFill>
                   <a:srgbClr val="00D4AA"/>
                 </a:solidFill>
@@ -2239,20 +2622,20 @@
               </a:rPr>
               <a:t># Output conditional on environment</a:t>
             </a:r>
-            <a:endParaRPr lang="en-US" sz="1050" dirty="0"/>
-          </a:p>
-          <a:p>
-            <a:pPr marL="0" indent="0">
-              <a:spcBef>
-                <a:spcPts val="200"/>
-              </a:spcBef>
-              <a:spcAft>
-                <a:spcPts val="200"/>
-              </a:spcAft>
-              <a:buNone/>
-            </a:pPr>
-            <a:r>
-              <a:rPr lang="en-US" sz="1050" dirty="0">
+            <a:endParaRPr lang="en-US" sz="600" dirty="0"/>
+          </a:p>
+          <a:p>
+            <a:pPr marL="0" indent="0">
+              <a:spcBef>
+                <a:spcPts val="200"/>
+              </a:spcBef>
+              <a:spcAft>
+                <a:spcPts val="200"/>
+              </a:spcAft>
+              <a:buNone/>
+            </a:pPr>
+            <a:r>
+              <a:rPr lang="en-US" sz="600" dirty="0">
                 <a:solidFill>
                   <a:srgbClr val="00D4AA"/>
                 </a:solidFill>
@@ -2262,20 +2645,20 @@
               </a:rPr>
               <a:t>output "db_endpoint" {</a:t>
             </a:r>
-            <a:endParaRPr lang="en-US" sz="1050" dirty="0"/>
-          </a:p>
-          <a:p>
-            <a:pPr marL="0" indent="0">
-              <a:spcBef>
-                <a:spcPts val="200"/>
-              </a:spcBef>
-              <a:spcAft>
-                <a:spcPts val="200"/>
-              </a:spcAft>
-              <a:buNone/>
-            </a:pPr>
-            <a:r>
-              <a:rPr lang="en-US" sz="1050" dirty="0">
+            <a:endParaRPr lang="en-US" sz="600" dirty="0"/>
+          </a:p>
+          <a:p>
+            <a:pPr marL="0" indent="0">
+              <a:spcBef>
+                <a:spcPts val="200"/>
+              </a:spcBef>
+              <a:spcAft>
+                <a:spcPts val="200"/>
+              </a:spcAft>
+              <a:buNone/>
+            </a:pPr>
+            <a:r>
+              <a:rPr lang="en-US" sz="600" dirty="0">
                 <a:solidFill>
                   <a:srgbClr val="00D4AA"/>
                 </a:solidFill>
@@ -2285,20 +2668,20 @@
               </a:rPr>
               <a:t>  value = var.environment == "prod" ? aws_rds_cluster.db[0].endpoint : null</a:t>
             </a:r>
-            <a:endParaRPr lang="en-US" sz="1050" dirty="0"/>
-          </a:p>
-          <a:p>
-            <a:pPr marL="0" indent="0">
-              <a:spcBef>
-                <a:spcPts val="200"/>
-              </a:spcBef>
-              <a:spcAft>
-                <a:spcPts val="200"/>
-              </a:spcAft>
-              <a:buNone/>
-            </a:pPr>
-            <a:r>
-              <a:rPr lang="en-US" sz="1050" dirty="0">
+            <a:endParaRPr lang="en-US" sz="600" dirty="0"/>
+          </a:p>
+          <a:p>
+            <a:pPr marL="0" indent="0">
+              <a:spcBef>
+                <a:spcPts val="200"/>
+              </a:spcBef>
+              <a:spcAft>
+                <a:spcPts val="200"/>
+              </a:spcAft>
+              <a:buNone/>
+            </a:pPr>
+            <a:r>
+              <a:rPr lang="en-US" sz="600" dirty="0">
                 <a:solidFill>
                   <a:srgbClr val="00D4AA"/>
                 </a:solidFill>
@@ -2308,7 +2691,7 @@
               </a:rPr>
               <a:t>}</a:t>
             </a:r>
-            <a:endParaRPr lang="en-US" sz="1050" dirty="0"/>
+            <a:endParaRPr lang="en-US" sz="600" dirty="0"/>
           </a:p>
         </p:txBody>
       </p:sp>
@@ -5842,7 +6225,7 @@
                 <a:ea typeface="Arial" pitchFamily="34" charset="-122"/>
                 <a:cs typeface="Arial" pitchFamily="34" charset="-120"/>
               </a:rPr>
-              <a:t>Lock the state file with S3 alone — DynamoDB no longer required</a:t>
+              <a:t>Lock the state file with S3 alone - DynamoDB no longer required</a:t>
             </a:r>
             <a:endParaRPr lang="en-US" sz="1300" dirty="0"/>
           </a:p>
@@ -6294,7 +6677,7 @@
                 <a:ea typeface="Arial" pitchFamily="34" charset="-122"/>
                 <a:cs typeface="Arial" pitchFamily="34" charset="-120"/>
               </a:rPr>
-              <a:t>S3 enforces the lock — </a:t>
+              <a:t>S3 enforces the lock - </a:t>
             </a:r>
             <a:r>
               <a:rPr lang="en-US" sz="1100" dirty="0">
@@ -6325,7 +6708,7 @@
                 <a:ea typeface="Arial" pitchFamily="34" charset="-122"/>
                 <a:cs typeface="Arial" pitchFamily="34" charset="-120"/>
               </a:rPr>
-              <a:t>Atomic via conditional writes — </a:t>
+              <a:t>Atomic via conditional writes - </a:t>
             </a:r>
             <a:r>
               <a:rPr lang="en-US" sz="1100" dirty="0">
@@ -6356,7 +6739,7 @@
                 <a:ea typeface="Arial" pitchFamily="34" charset="-122"/>
                 <a:cs typeface="Arial" pitchFamily="34" charset="-120"/>
               </a:rPr>
-              <a:t>No DynamoDB needed — </a:t>
+              <a:t>No DynamoDB needed - </a:t>
             </a:r>
             <a:r>
               <a:rPr lang="en-US" sz="1100" dirty="0">
@@ -6387,7 +6770,7 @@
                 <a:ea typeface="Arial" pitchFamily="34" charset="-122"/>
                 <a:cs typeface="Arial" pitchFamily="34" charset="-120"/>
               </a:rPr>
-              <a:t>Enable in one line — </a:t>
+              <a:t>Enable in one line - </a:t>
             </a:r>
             <a:r>
               <a:rPr lang="en-US" sz="1100" dirty="0">
@@ -6418,7 +6801,7 @@
                 <a:ea typeface="Arial" pitchFamily="34" charset="-122"/>
                 <a:cs typeface="Arial" pitchFamily="34" charset="-120"/>
               </a:rPr>
-              <a:t>Migration path — </a:t>
+              <a:t>Migration path - </a:t>
             </a:r>
             <a:r>
               <a:rPr lang="en-US" sz="1100" dirty="0">
